--- a/docs/Kuja_Market_Analysis_Deck_v5.pptx
+++ b/docs/Kuja_Market_Analysis_Deck_v5.pptx
@@ -30,6 +30,7 @@
     <p:sldId id="278" r:id="rId29"/>
     <p:sldId id="279" r:id="rId30"/>
     <p:sldId id="280" r:id="rId31"/>
+    <p:sldId id="281" r:id="rId32"/>
   </p:sldIdLst>
   <p:sldSz cx="12191695" cy="6858000" type="screen4x3"/>
   <p:notesSz cx="6858000" cy="9144000"/>
@@ -21971,7 +21972,7 @@
                 </a:solidFill>
                 <a:latin typeface="Calibri"/>
               </a:rPr>
-              <a:t>Roadmap</a:t>
+              <a:t>What Just Shipped — May 2026 Launch Wave</a:t>
             </a:r>
           </a:p>
         </p:txBody>
@@ -22006,35 +22007,56 @@
                 </a:solidFill>
                 <a:latin typeface="Calibri"/>
               </a:rPr>
-              <a:t>v5.0 launch wave shipped Q2 2026 · momentum continues through 2028.</a:t>
-            </a:r>
-          </a:p>
-        </p:txBody>
-      </p:sp>
-      <p:pic>
-        <p:nvPicPr>
-          <p:cNvPr id="5" name="Picture 4" descr="06_roadmap.png"/>
-          <p:cNvPicPr>
-            <a:picLocks noChangeAspect="1"/>
-          </p:cNvPicPr>
-          <p:nvPr/>
-        </p:nvPicPr>
-        <p:blipFill>
-          <a:blip r:embed="rId2"/>
-          <a:stretch>
-            <a:fillRect/>
-          </a:stretch>
-        </p:blipFill>
-        <p:spPr>
-          <a:xfrm>
-            <a:off x="457200" y="1005840"/>
-            <a:ext cx="11247120" cy="5469236"/>
-          </a:xfrm>
-          <a:prstGeom prst="rect">
-            <a:avLst/>
-          </a:prstGeom>
-        </p:spPr>
-      </p:pic>
+              <a:t>Phase 24-31 · 153 smoke tests · 100+ browser specs · 0 prod regressions.</a:t>
+            </a:r>
+          </a:p>
+        </p:txBody>
+      </p:sp>
+      <p:sp>
+        <p:nvSpPr>
+          <p:cNvPr id="5" name="Rounded Rectangle 4"/>
+          <p:cNvSpPr/>
+          <p:nvPr/>
+        </p:nvSpPr>
+        <p:spPr>
+          <a:xfrm>
+            <a:off x="457200" y="1280160"/>
+            <a:ext cx="2697480" cy="5029200"/>
+          </a:xfrm>
+          <a:prstGeom prst="roundRect">
+            <a:avLst/>
+          </a:prstGeom>
+          <a:solidFill>
+            <a:srgbClr val="FFFFFF"/>
+          </a:solidFill>
+          <a:ln w="15240">
+            <a:solidFill>
+              <a:srgbClr val="C2410C"/>
+            </a:solidFill>
+          </a:ln>
+        </p:spPr>
+        <p:style>
+          <a:lnRef idx="1">
+            <a:schemeClr val="accent1"/>
+          </a:lnRef>
+          <a:fillRef idx="3">
+            <a:schemeClr val="accent1"/>
+          </a:fillRef>
+          <a:effectRef idx="2">
+            <a:schemeClr val="accent1"/>
+          </a:effectRef>
+          <a:fontRef idx="minor">
+            <a:schemeClr val="lt1"/>
+          </a:fontRef>
+        </p:style>
+        <p:txBody>
+          <a:bodyPr rtlCol="0" anchor="ctr"/>
+          <a:lstStyle/>
+          <a:p>
+            <a:pPr algn="ctr"/>
+          </a:p>
+        </p:txBody>
+      </p:sp>
       <p:sp>
         <p:nvSpPr>
           <p:cNvPr id="6" name="Rectangle 5"/>
@@ -22043,8 +22065,230 @@
         </p:nvSpPr>
         <p:spPr>
           <a:xfrm>
-            <a:off x="0" y="6675120"/>
-            <a:ext cx="12191695" cy="182880"/>
+            <a:off x="457200" y="1280160"/>
+            <a:ext cx="2697480" cy="502920"/>
+          </a:xfrm>
+          <a:prstGeom prst="rect">
+            <a:avLst/>
+          </a:prstGeom>
+          <a:solidFill>
+            <a:srgbClr val="C2410C"/>
+          </a:solidFill>
+          <a:ln>
+            <a:noFill/>
+          </a:ln>
+        </p:spPr>
+        <p:style>
+          <a:lnRef idx="1">
+            <a:schemeClr val="accent1"/>
+          </a:lnRef>
+          <a:fillRef idx="3">
+            <a:schemeClr val="accent1"/>
+          </a:fillRef>
+          <a:effectRef idx="2">
+            <a:schemeClr val="accent1"/>
+          </a:effectRef>
+          <a:fontRef idx="minor">
+            <a:schemeClr val="lt1"/>
+          </a:fontRef>
+        </p:style>
+        <p:txBody>
+          <a:bodyPr rtlCol="0" anchor="ctr"/>
+          <a:lstStyle/>
+          <a:p>
+            <a:pPr algn="ctr"/>
+          </a:p>
+        </p:txBody>
+      </p:sp>
+      <p:sp>
+        <p:nvSpPr>
+          <p:cNvPr id="7" name="TextBox 6"/>
+          <p:cNvSpPr txBox="1"/>
+          <p:nvPr/>
+        </p:nvSpPr>
+        <p:spPr>
+          <a:xfrm>
+            <a:off x="457200" y="1280160"/>
+            <a:ext cx="2697480" cy="502920"/>
+          </a:xfrm>
+          <a:prstGeom prst="rect">
+            <a:avLst/>
+          </a:prstGeom>
+          <a:noFill/>
+        </p:spPr>
+        <p:txBody>
+          <a:bodyPr wrap="square" anchor="ctr">
+            <a:spAutoFit/>
+          </a:bodyPr>
+          <a:lstStyle/>
+          <a:p>
+            <a:pPr algn="ctr"/>
+            <a:r>
+              <a:rPr sz="1200" b="1" i="0">
+                <a:solidFill>
+                  <a:srgbClr val="FFFFFF"/>
+                </a:solidFill>
+                <a:latin typeface="Calibri"/>
+              </a:rPr>
+              <a:t>CONVERSATION</a:t>
+            </a:r>
+          </a:p>
+        </p:txBody>
+      </p:sp>
+      <p:sp>
+        <p:nvSpPr>
+          <p:cNvPr id="8" name="TextBox 7"/>
+          <p:cNvSpPr txBox="1"/>
+          <p:nvPr/>
+        </p:nvSpPr>
+        <p:spPr>
+          <a:xfrm>
+            <a:off x="640080" y="1920240"/>
+            <a:ext cx="2331720" cy="4251960"/>
+          </a:xfrm>
+          <a:prstGeom prst="rect">
+            <a:avLst/>
+          </a:prstGeom>
+          <a:noFill/>
+        </p:spPr>
+        <p:txBody>
+          <a:bodyPr wrap="square">
+            <a:spAutoFit/>
+          </a:bodyPr>
+          <a:lstStyle/>
+          <a:p>
+            <a:pPr>
+              <a:lnSpc>
+                <a:spcPct val="118000"/>
+              </a:lnSpc>
+              <a:spcAft>
+                <a:spcPts val="800"/>
+              </a:spcAft>
+            </a:pPr>
+            <a:r>
+              <a:rPr sz="1050">
+                <a:solidFill>
+                  <a:srgbClr val="1F2937"/>
+                </a:solidFill>
+                <a:latin typeface="Calibri"/>
+              </a:rPr>
+              <a:t>• Sustained AI chat (Phase 24B)</a:t>
+            </a:r>
+          </a:p>
+          <a:p>
+            <a:pPr>
+              <a:lnSpc>
+                <a:spcPct val="118000"/>
+              </a:lnSpc>
+              <a:spcAft>
+                <a:spcPts val="800"/>
+              </a:spcAft>
+            </a:pPr>
+            <a:r>
+              <a:rPr sz="1050">
+                <a:solidFill>
+                  <a:srgbClr val="1F2937"/>
+                </a:solidFill>
+                <a:latin typeface="Calibri"/>
+              </a:rPr>
+              <a:t>• Per-entity chat on grant/app/report (25B, 26A)</a:t>
+            </a:r>
+          </a:p>
+          <a:p>
+            <a:pPr>
+              <a:lnSpc>
+                <a:spcPct val="118000"/>
+              </a:lnSpc>
+              <a:spcAft>
+                <a:spcPts val="800"/>
+              </a:spcAft>
+            </a:pPr>
+            <a:r>
+              <a:rPr sz="1050">
+                <a:solidFill>
+                  <a:srgbClr val="1F2937"/>
+                </a:solidFill>
+                <a:latin typeface="Calibri"/>
+              </a:rPr>
+              <a:t>• Anti-hallucination discipline footer</a:t>
+            </a:r>
+          </a:p>
+          <a:p>
+            <a:pPr>
+              <a:lnSpc>
+                <a:spcPct val="118000"/>
+              </a:lnSpc>
+              <a:spcAft>
+                <a:spcPts val="800"/>
+              </a:spcAft>
+            </a:pPr>
+            <a:r>
+              <a:rPr sz="1050">
+                <a:solidFill>
+                  <a:srgbClr val="1F2937"/>
+                </a:solidFill>
+                <a:latin typeface="Calibri"/>
+              </a:rPr>
+              <a:t>• Reset + per-user thread isolation</a:t>
+            </a:r>
+          </a:p>
+        </p:txBody>
+      </p:sp>
+      <p:sp>
+        <p:nvSpPr>
+          <p:cNvPr id="9" name="Rounded Rectangle 8"/>
+          <p:cNvSpPr/>
+          <p:nvPr/>
+        </p:nvSpPr>
+        <p:spPr>
+          <a:xfrm>
+            <a:off x="3273552" y="1280160"/>
+            <a:ext cx="2697480" cy="5029200"/>
+          </a:xfrm>
+          <a:prstGeom prst="roundRect">
+            <a:avLst/>
+          </a:prstGeom>
+          <a:solidFill>
+            <a:srgbClr val="FFFFFF"/>
+          </a:solidFill>
+          <a:ln w="15240">
+            <a:solidFill>
+              <a:srgbClr val="1B3A5C"/>
+            </a:solidFill>
+          </a:ln>
+        </p:spPr>
+        <p:style>
+          <a:lnRef idx="1">
+            <a:schemeClr val="accent1"/>
+          </a:lnRef>
+          <a:fillRef idx="3">
+            <a:schemeClr val="accent1"/>
+          </a:fillRef>
+          <a:effectRef idx="2">
+            <a:schemeClr val="accent1"/>
+          </a:effectRef>
+          <a:fontRef idx="minor">
+            <a:schemeClr val="lt1"/>
+          </a:fontRef>
+        </p:style>
+        <p:txBody>
+          <a:bodyPr rtlCol="0" anchor="ctr"/>
+          <a:lstStyle/>
+          <a:p>
+            <a:pPr algn="ctr"/>
+          </a:p>
+        </p:txBody>
+      </p:sp>
+      <p:sp>
+        <p:nvSpPr>
+          <p:cNvPr id="10" name="Rectangle 9"/>
+          <p:cNvSpPr/>
+          <p:nvPr/>
+        </p:nvSpPr>
+        <p:spPr>
+          <a:xfrm>
+            <a:off x="3273552" y="1280160"/>
+            <a:ext cx="2697480" cy="502920"/>
           </a:xfrm>
           <a:prstGeom prst="rect">
             <a:avLst/>
@@ -22080,7 +22324,706 @@
       </p:sp>
       <p:sp>
         <p:nvSpPr>
-          <p:cNvPr id="7" name="TextBox 6"/>
+          <p:cNvPr id="11" name="TextBox 10"/>
+          <p:cNvSpPr txBox="1"/>
+          <p:nvPr/>
+        </p:nvSpPr>
+        <p:spPr>
+          <a:xfrm>
+            <a:off x="3273552" y="1280160"/>
+            <a:ext cx="2697480" cy="502920"/>
+          </a:xfrm>
+          <a:prstGeom prst="rect">
+            <a:avLst/>
+          </a:prstGeom>
+          <a:noFill/>
+        </p:spPr>
+        <p:txBody>
+          <a:bodyPr wrap="square" anchor="ctr">
+            <a:spAutoFit/>
+          </a:bodyPr>
+          <a:lstStyle/>
+          <a:p>
+            <a:pPr algn="ctr"/>
+            <a:r>
+              <a:rPr sz="1200" b="1" i="0">
+                <a:solidFill>
+                  <a:srgbClr val="FFFFFF"/>
+                </a:solidFill>
+                <a:latin typeface="Calibri"/>
+              </a:rPr>
+              <a:t>REVIEWER OPS</a:t>
+            </a:r>
+          </a:p>
+        </p:txBody>
+      </p:sp>
+      <p:sp>
+        <p:nvSpPr>
+          <p:cNvPr id="12" name="TextBox 11"/>
+          <p:cNvSpPr txBox="1"/>
+          <p:nvPr/>
+        </p:nvSpPr>
+        <p:spPr>
+          <a:xfrm>
+            <a:off x="3456432" y="1920240"/>
+            <a:ext cx="2331720" cy="4251960"/>
+          </a:xfrm>
+          <a:prstGeom prst="rect">
+            <a:avLst/>
+          </a:prstGeom>
+          <a:noFill/>
+        </p:spPr>
+        <p:txBody>
+          <a:bodyPr wrap="square">
+            <a:spAutoFit/>
+          </a:bodyPr>
+          <a:lstStyle/>
+          <a:p>
+            <a:pPr>
+              <a:lnSpc>
+                <a:spcPct val="118000"/>
+              </a:lnSpc>
+              <a:spcAft>
+                <a:spcPts val="800"/>
+              </a:spcAft>
+            </a:pPr>
+            <a:r>
+              <a:rPr sz="1050">
+                <a:solidFill>
+                  <a:srgbClr val="1F2937"/>
+                </a:solidFill>
+                <a:latin typeface="Calibri"/>
+              </a:rPr>
+              <a:t>• Auto-assign on submit (Phase 25A)</a:t>
+            </a:r>
+          </a:p>
+          <a:p>
+            <a:pPr>
+              <a:lnSpc>
+                <a:spcPct val="118000"/>
+              </a:lnSpc>
+              <a:spcAft>
+                <a:spcPts val="800"/>
+              </a:spcAft>
+            </a:pPr>
+            <a:r>
+              <a:rPr sz="1050">
+                <a:solidFill>
+                  <a:srgbClr val="1F2937"/>
+                </a:solidFill>
+                <a:latin typeface="Calibri"/>
+              </a:rPr>
+              <a:t>• Nightly safety-net cron (Phase 26B)</a:t>
+            </a:r>
+          </a:p>
+          <a:p>
+            <a:pPr>
+              <a:lnSpc>
+                <a:spcPct val="118000"/>
+              </a:lnSpc>
+              <a:spcAft>
+                <a:spcPts val="800"/>
+              </a:spcAft>
+            </a:pPr>
+            <a:r>
+              <a:rPr sz="1050">
+                <a:solidFill>
+                  <a:srgbClr val="1F2937"/>
+                </a:solidFill>
+                <a:latin typeface="Calibri"/>
+              </a:rPr>
+              <a:t>• Side-by-side reviewer scoring (23A)</a:t>
+            </a:r>
+          </a:p>
+          <a:p>
+            <a:pPr>
+              <a:lnSpc>
+                <a:spcPct val="118000"/>
+              </a:lnSpc>
+              <a:spcAft>
+                <a:spcPts val="800"/>
+              </a:spcAft>
+            </a:pPr>
+            <a:r>
+              <a:rPr sz="1050">
+                <a:solidFill>
+                  <a:srgbClr val="1F2937"/>
+                </a:solidFill>
+                <a:latin typeface="Calibri"/>
+              </a:rPr>
+              <a:t>• Panel calibration cards (21A)</a:t>
+            </a:r>
+          </a:p>
+        </p:txBody>
+      </p:sp>
+      <p:sp>
+        <p:nvSpPr>
+          <p:cNvPr id="13" name="Rounded Rectangle 12"/>
+          <p:cNvSpPr/>
+          <p:nvPr/>
+        </p:nvSpPr>
+        <p:spPr>
+          <a:xfrm>
+            <a:off x="6089904" y="1280160"/>
+            <a:ext cx="2697480" cy="5029200"/>
+          </a:xfrm>
+          <a:prstGeom prst="roundRect">
+            <a:avLst/>
+          </a:prstGeom>
+          <a:solidFill>
+            <a:srgbClr val="FFFFFF"/>
+          </a:solidFill>
+          <a:ln w="15240">
+            <a:solidFill>
+              <a:srgbClr val="2C5F8A"/>
+            </a:solidFill>
+          </a:ln>
+        </p:spPr>
+        <p:style>
+          <a:lnRef idx="1">
+            <a:schemeClr val="accent1"/>
+          </a:lnRef>
+          <a:fillRef idx="3">
+            <a:schemeClr val="accent1"/>
+          </a:fillRef>
+          <a:effectRef idx="2">
+            <a:schemeClr val="accent1"/>
+          </a:effectRef>
+          <a:fontRef idx="minor">
+            <a:schemeClr val="lt1"/>
+          </a:fontRef>
+        </p:style>
+        <p:txBody>
+          <a:bodyPr rtlCol="0" anchor="ctr"/>
+          <a:lstStyle/>
+          <a:p>
+            <a:pPr algn="ctr"/>
+          </a:p>
+        </p:txBody>
+      </p:sp>
+      <p:sp>
+        <p:nvSpPr>
+          <p:cNvPr id="14" name="Rectangle 13"/>
+          <p:cNvSpPr/>
+          <p:nvPr/>
+        </p:nvSpPr>
+        <p:spPr>
+          <a:xfrm>
+            <a:off x="6089904" y="1280160"/>
+            <a:ext cx="2697480" cy="502920"/>
+          </a:xfrm>
+          <a:prstGeom prst="rect">
+            <a:avLst/>
+          </a:prstGeom>
+          <a:solidFill>
+            <a:srgbClr val="2C5F8A"/>
+          </a:solidFill>
+          <a:ln>
+            <a:noFill/>
+          </a:ln>
+        </p:spPr>
+        <p:style>
+          <a:lnRef idx="1">
+            <a:schemeClr val="accent1"/>
+          </a:lnRef>
+          <a:fillRef idx="3">
+            <a:schemeClr val="accent1"/>
+          </a:fillRef>
+          <a:effectRef idx="2">
+            <a:schemeClr val="accent1"/>
+          </a:effectRef>
+          <a:fontRef idx="minor">
+            <a:schemeClr val="lt1"/>
+          </a:fontRef>
+        </p:style>
+        <p:txBody>
+          <a:bodyPr rtlCol="0" anchor="ctr"/>
+          <a:lstStyle/>
+          <a:p>
+            <a:pPr algn="ctr"/>
+          </a:p>
+        </p:txBody>
+      </p:sp>
+      <p:sp>
+        <p:nvSpPr>
+          <p:cNvPr id="15" name="TextBox 14"/>
+          <p:cNvSpPr txBox="1"/>
+          <p:nvPr/>
+        </p:nvSpPr>
+        <p:spPr>
+          <a:xfrm>
+            <a:off x="6089904" y="1280160"/>
+            <a:ext cx="2697480" cy="502920"/>
+          </a:xfrm>
+          <a:prstGeom prst="rect">
+            <a:avLst/>
+          </a:prstGeom>
+          <a:noFill/>
+        </p:spPr>
+        <p:txBody>
+          <a:bodyPr wrap="square" anchor="ctr">
+            <a:spAutoFit/>
+          </a:bodyPr>
+          <a:lstStyle/>
+          <a:p>
+            <a:pPr algn="ctr"/>
+            <a:r>
+              <a:rPr sz="1200" b="1" i="0">
+                <a:solidFill>
+                  <a:srgbClr val="FFFFFF"/>
+                </a:solidFill>
+                <a:latin typeface="Calibri"/>
+              </a:rPr>
+              <a:t>DONOR INTEL</a:t>
+            </a:r>
+          </a:p>
+        </p:txBody>
+      </p:sp>
+      <p:sp>
+        <p:nvSpPr>
+          <p:cNvPr id="16" name="TextBox 15"/>
+          <p:cNvSpPr txBox="1"/>
+          <p:nvPr/>
+        </p:nvSpPr>
+        <p:spPr>
+          <a:xfrm>
+            <a:off x="6272784" y="1920240"/>
+            <a:ext cx="2331720" cy="4251960"/>
+          </a:xfrm>
+          <a:prstGeom prst="rect">
+            <a:avLst/>
+          </a:prstGeom>
+          <a:noFill/>
+        </p:spPr>
+        <p:txBody>
+          <a:bodyPr wrap="square">
+            <a:spAutoFit/>
+          </a:bodyPr>
+          <a:lstStyle/>
+          <a:p>
+            <a:pPr>
+              <a:lnSpc>
+                <a:spcPct val="118000"/>
+              </a:lnSpc>
+              <a:spcAft>
+                <a:spcPts val="800"/>
+              </a:spcAft>
+            </a:pPr>
+            <a:r>
+              <a:rPr sz="1050">
+                <a:solidFill>
+                  <a:srgbClr val="1F2937"/>
+                </a:solidFill>
+                <a:latin typeface="Calibri"/>
+              </a:rPr>
+              <a:t>• Cohort analytics — your NGOs vs cohort (24C)</a:t>
+            </a:r>
+          </a:p>
+          <a:p>
+            <a:pPr>
+              <a:lnSpc>
+                <a:spcPct val="118000"/>
+              </a:lnSpc>
+              <a:spcAft>
+                <a:spcPts val="800"/>
+              </a:spcAft>
+            </a:pPr>
+            <a:r>
+              <a:rPr sz="1050">
+                <a:solidFill>
+                  <a:srgbClr val="1F2937"/>
+                </a:solidFill>
+                <a:latin typeface="Calibri"/>
+              </a:rPr>
+              <a:t>• Risk heatmap by sector × country (23B)</a:t>
+            </a:r>
+          </a:p>
+          <a:p>
+            <a:pPr>
+              <a:lnSpc>
+                <a:spcPct val="118000"/>
+              </a:lnSpc>
+              <a:spcAft>
+                <a:spcPts val="800"/>
+              </a:spcAft>
+            </a:pPr>
+            <a:r>
+              <a:rPr sz="1050">
+                <a:solidFill>
+                  <a:srgbClr val="1F2937"/>
+                </a:solidFill>
+                <a:latin typeface="Calibri"/>
+              </a:rPr>
+              <a:t>• Admin path on /donors/[id] (25C)</a:t>
+            </a:r>
+          </a:p>
+          <a:p>
+            <a:pPr>
+              <a:lnSpc>
+                <a:spcPct val="118000"/>
+              </a:lnSpc>
+              <a:spcAft>
+                <a:spcPts val="800"/>
+              </a:spcAft>
+            </a:pPr>
+            <a:r>
+              <a:rPr sz="1050">
+                <a:solidFill>
+                  <a:srgbClr val="1F2937"/>
+                </a:solidFill>
+                <a:latin typeface="Calibri"/>
+              </a:rPr>
+              <a:t>• Sparse-honest below MIN_COHORT</a:t>
+            </a:r>
+          </a:p>
+        </p:txBody>
+      </p:sp>
+      <p:sp>
+        <p:nvSpPr>
+          <p:cNvPr id="17" name="Rounded Rectangle 16"/>
+          <p:cNvSpPr/>
+          <p:nvPr/>
+        </p:nvSpPr>
+        <p:spPr>
+          <a:xfrm>
+            <a:off x="8906256" y="1280160"/>
+            <a:ext cx="2697480" cy="5029200"/>
+          </a:xfrm>
+          <a:prstGeom prst="roundRect">
+            <a:avLst/>
+          </a:prstGeom>
+          <a:solidFill>
+            <a:srgbClr val="FFFFFF"/>
+          </a:solidFill>
+          <a:ln w="15240">
+            <a:solidFill>
+              <a:srgbClr val="C2410C"/>
+            </a:solidFill>
+          </a:ln>
+        </p:spPr>
+        <p:style>
+          <a:lnRef idx="1">
+            <a:schemeClr val="accent1"/>
+          </a:lnRef>
+          <a:fillRef idx="3">
+            <a:schemeClr val="accent1"/>
+          </a:fillRef>
+          <a:effectRef idx="2">
+            <a:schemeClr val="accent1"/>
+          </a:effectRef>
+          <a:fontRef idx="minor">
+            <a:schemeClr val="lt1"/>
+          </a:fontRef>
+        </p:style>
+        <p:txBody>
+          <a:bodyPr rtlCol="0" anchor="ctr"/>
+          <a:lstStyle/>
+          <a:p>
+            <a:pPr algn="ctr"/>
+          </a:p>
+        </p:txBody>
+      </p:sp>
+      <p:sp>
+        <p:nvSpPr>
+          <p:cNvPr id="18" name="Rectangle 17"/>
+          <p:cNvSpPr/>
+          <p:nvPr/>
+        </p:nvSpPr>
+        <p:spPr>
+          <a:xfrm>
+            <a:off x="8906256" y="1280160"/>
+            <a:ext cx="2697480" cy="502920"/>
+          </a:xfrm>
+          <a:prstGeom prst="rect">
+            <a:avLst/>
+          </a:prstGeom>
+          <a:solidFill>
+            <a:srgbClr val="C2410C"/>
+          </a:solidFill>
+          <a:ln>
+            <a:noFill/>
+          </a:ln>
+        </p:spPr>
+        <p:style>
+          <a:lnRef idx="1">
+            <a:schemeClr val="accent1"/>
+          </a:lnRef>
+          <a:fillRef idx="3">
+            <a:schemeClr val="accent1"/>
+          </a:fillRef>
+          <a:effectRef idx="2">
+            <a:schemeClr val="accent1"/>
+          </a:effectRef>
+          <a:fontRef idx="minor">
+            <a:schemeClr val="lt1"/>
+          </a:fontRef>
+        </p:style>
+        <p:txBody>
+          <a:bodyPr rtlCol="0" anchor="ctr"/>
+          <a:lstStyle/>
+          <a:p>
+            <a:pPr algn="ctr"/>
+          </a:p>
+        </p:txBody>
+      </p:sp>
+      <p:sp>
+        <p:nvSpPr>
+          <p:cNvPr id="19" name="TextBox 18"/>
+          <p:cNvSpPr txBox="1"/>
+          <p:nvPr/>
+        </p:nvSpPr>
+        <p:spPr>
+          <a:xfrm>
+            <a:off x="8906256" y="1280160"/>
+            <a:ext cx="2697480" cy="502920"/>
+          </a:xfrm>
+          <a:prstGeom prst="rect">
+            <a:avLst/>
+          </a:prstGeom>
+          <a:noFill/>
+        </p:spPr>
+        <p:txBody>
+          <a:bodyPr wrap="square" anchor="ctr">
+            <a:spAutoFit/>
+          </a:bodyPr>
+          <a:lstStyle/>
+          <a:p>
+            <a:pPr algn="ctr"/>
+            <a:r>
+              <a:rPr sz="1200" b="1" i="0">
+                <a:solidFill>
+                  <a:srgbClr val="FFFFFF"/>
+                </a:solidFill>
+                <a:latin typeface="Calibri"/>
+              </a:rPr>
+              <a:t>METRICS + TRUST</a:t>
+            </a:r>
+          </a:p>
+        </p:txBody>
+      </p:sp>
+      <p:sp>
+        <p:nvSpPr>
+          <p:cNvPr id="20" name="TextBox 19"/>
+          <p:cNvSpPr txBox="1"/>
+          <p:nvPr/>
+        </p:nvSpPr>
+        <p:spPr>
+          <a:xfrm>
+            <a:off x="9089136" y="1920240"/>
+            <a:ext cx="2331720" cy="4251960"/>
+          </a:xfrm>
+          <a:prstGeom prst="rect">
+            <a:avLst/>
+          </a:prstGeom>
+          <a:noFill/>
+        </p:spPr>
+        <p:txBody>
+          <a:bodyPr wrap="square">
+            <a:spAutoFit/>
+          </a:bodyPr>
+          <a:lstStyle/>
+          <a:p>
+            <a:pPr>
+              <a:lnSpc>
+                <a:spcPct val="118000"/>
+              </a:lnSpc>
+              <a:spcAft>
+                <a:spcPts val="800"/>
+              </a:spcAft>
+            </a:pPr>
+            <a:r>
+              <a:rPr sz="1050">
+                <a:solidFill>
+                  <a:srgbClr val="1F2937"/>
+                </a:solidFill>
+                <a:latin typeface="Calibri"/>
+              </a:rPr>
+              <a:t>• UserEvent backbone + 6 funnels (29-30)</a:t>
+            </a:r>
+          </a:p>
+          <a:p>
+            <a:pPr>
+              <a:lnSpc>
+                <a:spcPct val="118000"/>
+              </a:lnSpc>
+              <a:spcAft>
+                <a:spcPts val="800"/>
+              </a:spcAft>
+            </a:pPr>
+            <a:r>
+              <a:rPr sz="1050">
+                <a:solidFill>
+                  <a:srgbClr val="1F2937"/>
+                </a:solidFill>
+                <a:latin typeface="Calibri"/>
+              </a:rPr>
+              <a:t>• NPS micro-survey at submit (31)</a:t>
+            </a:r>
+          </a:p>
+          <a:p>
+            <a:pPr>
+              <a:lnSpc>
+                <a:spcPct val="118000"/>
+              </a:lnSpc>
+              <a:spcAft>
+                <a:spcPts val="800"/>
+              </a:spcAft>
+            </a:pPr>
+            <a:r>
+              <a:rPr sz="1050">
+                <a:solidFill>
+                  <a:srgbClr val="1F2937"/>
+                </a:solidFill>
+                <a:latin typeface="Calibri"/>
+              </a:rPr>
+              <a:t>• WebAuthn biometric re-auth (26C)</a:t>
+            </a:r>
+          </a:p>
+          <a:p>
+            <a:pPr>
+              <a:lnSpc>
+                <a:spcPct val="118000"/>
+              </a:lnSpc>
+              <a:spcAft>
+                <a:spcPts val="800"/>
+              </a:spcAft>
+            </a:pPr>
+            <a:r>
+              <a:rPr sz="1050">
+                <a:solidFill>
+                  <a:srgbClr val="1F2937"/>
+                </a:solidFill>
+                <a:latin typeface="Calibri"/>
+              </a:rPr>
+              <a:t>• Per-language parity breakdowns</a:t>
+            </a:r>
+          </a:p>
+        </p:txBody>
+      </p:sp>
+      <p:sp>
+        <p:nvSpPr>
+          <p:cNvPr id="21" name="Rectangle 20"/>
+          <p:cNvSpPr/>
+          <p:nvPr/>
+        </p:nvSpPr>
+        <p:spPr>
+          <a:xfrm>
+            <a:off x="457200" y="6400800"/>
+            <a:ext cx="11247120" cy="365760"/>
+          </a:xfrm>
+          <a:prstGeom prst="rect">
+            <a:avLst/>
+          </a:prstGeom>
+          <a:solidFill>
+            <a:srgbClr val="1B3A5C"/>
+          </a:solidFill>
+          <a:ln>
+            <a:noFill/>
+          </a:ln>
+        </p:spPr>
+        <p:style>
+          <a:lnRef idx="1">
+            <a:schemeClr val="accent1"/>
+          </a:lnRef>
+          <a:fillRef idx="3">
+            <a:schemeClr val="accent1"/>
+          </a:fillRef>
+          <a:effectRef idx="2">
+            <a:schemeClr val="accent1"/>
+          </a:effectRef>
+          <a:fontRef idx="minor">
+            <a:schemeClr val="lt1"/>
+          </a:fontRef>
+        </p:style>
+        <p:txBody>
+          <a:bodyPr rtlCol="0" anchor="ctr"/>
+          <a:lstStyle/>
+          <a:p>
+            <a:pPr algn="ctr"/>
+          </a:p>
+        </p:txBody>
+      </p:sp>
+      <p:sp>
+        <p:nvSpPr>
+          <p:cNvPr id="22" name="TextBox 21"/>
+          <p:cNvSpPr txBox="1"/>
+          <p:nvPr/>
+        </p:nvSpPr>
+        <p:spPr>
+          <a:xfrm>
+            <a:off x="0" y="6446520"/>
+            <a:ext cx="12191695" cy="274320"/>
+          </a:xfrm>
+          <a:prstGeom prst="rect">
+            <a:avLst/>
+          </a:prstGeom>
+          <a:noFill/>
+        </p:spPr>
+        <p:txBody>
+          <a:bodyPr wrap="square" anchor="ctr">
+            <a:spAutoFit/>
+          </a:bodyPr>
+          <a:lstStyle/>
+          <a:p>
+            <a:pPr algn="ctr"/>
+            <a:r>
+              <a:rPr sz="1150" b="0" i="1">
+                <a:solidFill>
+                  <a:srgbClr val="FFFFFF"/>
+                </a:solidFill>
+                <a:latin typeface="Calibri"/>
+              </a:rPr>
+              <a:t>Ship → measure → decide → ship next. Real-user data drives the next round of investment.</a:t>
+            </a:r>
+          </a:p>
+        </p:txBody>
+      </p:sp>
+      <p:sp>
+        <p:nvSpPr>
+          <p:cNvPr id="23" name="Rectangle 22"/>
+          <p:cNvSpPr/>
+          <p:nvPr/>
+        </p:nvSpPr>
+        <p:spPr>
+          <a:xfrm>
+            <a:off x="0" y="6675120"/>
+            <a:ext cx="12191695" cy="182880"/>
+          </a:xfrm>
+          <a:prstGeom prst="rect">
+            <a:avLst/>
+          </a:prstGeom>
+          <a:solidFill>
+            <a:srgbClr val="1B3A5C"/>
+          </a:solidFill>
+          <a:ln>
+            <a:noFill/>
+          </a:ln>
+        </p:spPr>
+        <p:style>
+          <a:lnRef idx="1">
+            <a:schemeClr val="accent1"/>
+          </a:lnRef>
+          <a:fillRef idx="3">
+            <a:schemeClr val="accent1"/>
+          </a:fillRef>
+          <a:effectRef idx="2">
+            <a:schemeClr val="accent1"/>
+          </a:effectRef>
+          <a:fontRef idx="minor">
+            <a:schemeClr val="lt1"/>
+          </a:fontRef>
+        </p:style>
+        <p:txBody>
+          <a:bodyPr rtlCol="0" anchor="ctr"/>
+          <a:lstStyle/>
+          <a:p>
+            <a:pPr algn="ctr"/>
+          </a:p>
+        </p:txBody>
+      </p:sp>
+      <p:sp>
+        <p:nvSpPr>
+          <p:cNvPr id="24" name="TextBox 23"/>
           <p:cNvSpPr txBox="1"/>
           <p:nvPr/>
         </p:nvSpPr>
@@ -22115,7 +23058,7 @@
       </p:sp>
       <p:sp>
         <p:nvSpPr>
-          <p:cNvPr id="8" name="TextBox 7"/>
+          <p:cNvPr id="25" name="TextBox 24"/>
           <p:cNvSpPr txBox="1"/>
           <p:nvPr/>
         </p:nvSpPr>
@@ -22157,6 +23100,274 @@
 </file>
 
 <file path=ppt/slides/slide25.xml><?xml version="1.0" encoding="utf-8"?>
+<p:sld xmlns:a="http://schemas.openxmlformats.org/drawingml/2006/main" xmlns:p="http://schemas.openxmlformats.org/presentationml/2006/main" xmlns:r="http://schemas.openxmlformats.org/officeDocument/2006/relationships">
+  <p:cSld>
+    <p:spTree>
+      <p:nvGrpSpPr>
+        <p:cNvPr id="1" name=""/>
+        <p:cNvGrpSpPr/>
+        <p:nvPr/>
+      </p:nvGrpSpPr>
+      <p:grpSpPr/>
+      <p:sp>
+        <p:nvSpPr>
+          <p:cNvPr id="2" name="Rectangle 1"/>
+          <p:cNvSpPr/>
+          <p:nvPr/>
+        </p:nvSpPr>
+        <p:spPr>
+          <a:xfrm>
+            <a:off x="0" y="0"/>
+            <a:ext cx="12191695" cy="777240"/>
+          </a:xfrm>
+          <a:prstGeom prst="rect">
+            <a:avLst/>
+          </a:prstGeom>
+          <a:solidFill>
+            <a:srgbClr val="1B3A5C"/>
+          </a:solidFill>
+          <a:ln>
+            <a:noFill/>
+          </a:ln>
+        </p:spPr>
+        <p:style>
+          <a:lnRef idx="1">
+            <a:schemeClr val="accent1"/>
+          </a:lnRef>
+          <a:fillRef idx="3">
+            <a:schemeClr val="accent1"/>
+          </a:fillRef>
+          <a:effectRef idx="2">
+            <a:schemeClr val="accent1"/>
+          </a:effectRef>
+          <a:fontRef idx="minor">
+            <a:schemeClr val="lt1"/>
+          </a:fontRef>
+        </p:style>
+        <p:txBody>
+          <a:bodyPr rtlCol="0" anchor="ctr"/>
+          <a:lstStyle/>
+          <a:p>
+            <a:pPr algn="ctr"/>
+          </a:p>
+        </p:txBody>
+      </p:sp>
+      <p:sp>
+        <p:nvSpPr>
+          <p:cNvPr id="3" name="TextBox 2"/>
+          <p:cNvSpPr txBox="1"/>
+          <p:nvPr/>
+        </p:nvSpPr>
+        <p:spPr>
+          <a:xfrm>
+            <a:off x="457200" y="91440"/>
+            <a:ext cx="11247120" cy="502920"/>
+          </a:xfrm>
+          <a:prstGeom prst="rect">
+            <a:avLst/>
+          </a:prstGeom>
+          <a:noFill/>
+        </p:spPr>
+        <p:txBody>
+          <a:bodyPr wrap="square" anchor="ctr">
+            <a:spAutoFit/>
+          </a:bodyPr>
+          <a:lstStyle/>
+          <a:p>
+            <a:pPr algn="l"/>
+            <a:r>
+              <a:rPr sz="2200" b="1" i="0">
+                <a:solidFill>
+                  <a:srgbClr val="FFFFFF"/>
+                </a:solidFill>
+                <a:latin typeface="Calibri"/>
+              </a:rPr>
+              <a:t>Roadmap</a:t>
+            </a:r>
+          </a:p>
+        </p:txBody>
+      </p:sp>
+      <p:sp>
+        <p:nvSpPr>
+          <p:cNvPr id="4" name="TextBox 3"/>
+          <p:cNvSpPr txBox="1"/>
+          <p:nvPr/>
+        </p:nvSpPr>
+        <p:spPr>
+          <a:xfrm>
+            <a:off x="457200" y="411480"/>
+            <a:ext cx="11247120" cy="320040"/>
+          </a:xfrm>
+          <a:prstGeom prst="rect">
+            <a:avLst/>
+          </a:prstGeom>
+          <a:noFill/>
+        </p:spPr>
+        <p:txBody>
+          <a:bodyPr wrap="square" anchor="ctr">
+            <a:spAutoFit/>
+          </a:bodyPr>
+          <a:lstStyle/>
+          <a:p>
+            <a:pPr algn="l"/>
+            <a:r>
+              <a:rPr sz="1100" b="0" i="1">
+                <a:solidFill>
+                  <a:srgbClr val="FFE4D6"/>
+                </a:solidFill>
+                <a:latin typeface="Calibri"/>
+              </a:rPr>
+              <a:t>v5.0 launch wave shipped Q2 2026 · momentum continues through 2028.</a:t>
+            </a:r>
+          </a:p>
+        </p:txBody>
+      </p:sp>
+      <p:pic>
+        <p:nvPicPr>
+          <p:cNvPr id="5" name="Picture 4" descr="06_roadmap.png"/>
+          <p:cNvPicPr>
+            <a:picLocks noChangeAspect="1"/>
+          </p:cNvPicPr>
+          <p:nvPr/>
+        </p:nvPicPr>
+        <p:blipFill>
+          <a:blip r:embed="rId2"/>
+          <a:stretch>
+            <a:fillRect/>
+          </a:stretch>
+        </p:blipFill>
+        <p:spPr>
+          <a:xfrm>
+            <a:off x="457200" y="1005840"/>
+            <a:ext cx="11247120" cy="5469236"/>
+          </a:xfrm>
+          <a:prstGeom prst="rect">
+            <a:avLst/>
+          </a:prstGeom>
+        </p:spPr>
+      </p:pic>
+      <p:sp>
+        <p:nvSpPr>
+          <p:cNvPr id="6" name="Rectangle 5"/>
+          <p:cNvSpPr/>
+          <p:nvPr/>
+        </p:nvSpPr>
+        <p:spPr>
+          <a:xfrm>
+            <a:off x="0" y="6675120"/>
+            <a:ext cx="12191695" cy="182880"/>
+          </a:xfrm>
+          <a:prstGeom prst="rect">
+            <a:avLst/>
+          </a:prstGeom>
+          <a:solidFill>
+            <a:srgbClr val="1B3A5C"/>
+          </a:solidFill>
+          <a:ln>
+            <a:noFill/>
+          </a:ln>
+        </p:spPr>
+        <p:style>
+          <a:lnRef idx="1">
+            <a:schemeClr val="accent1"/>
+          </a:lnRef>
+          <a:fillRef idx="3">
+            <a:schemeClr val="accent1"/>
+          </a:fillRef>
+          <a:effectRef idx="2">
+            <a:schemeClr val="accent1"/>
+          </a:effectRef>
+          <a:fontRef idx="minor">
+            <a:schemeClr val="lt1"/>
+          </a:fontRef>
+        </p:style>
+        <p:txBody>
+          <a:bodyPr rtlCol="0" anchor="ctr"/>
+          <a:lstStyle/>
+          <a:p>
+            <a:pPr algn="ctr"/>
+          </a:p>
+        </p:txBody>
+      </p:sp>
+      <p:sp>
+        <p:nvSpPr>
+          <p:cNvPr id="7" name="TextBox 6"/>
+          <p:cNvSpPr txBox="1"/>
+          <p:nvPr/>
+        </p:nvSpPr>
+        <p:spPr>
+          <a:xfrm>
+            <a:off x="457200" y="6675120"/>
+            <a:ext cx="7315200" cy="182880"/>
+          </a:xfrm>
+          <a:prstGeom prst="rect">
+            <a:avLst/>
+          </a:prstGeom>
+          <a:noFill/>
+        </p:spPr>
+        <p:txBody>
+          <a:bodyPr wrap="square" anchor="t">
+            <a:spAutoFit/>
+          </a:bodyPr>
+          <a:lstStyle/>
+          <a:p>
+            <a:pPr algn="l"/>
+            <a:r>
+              <a:rPr sz="900" b="0" i="1">
+                <a:solidFill>
+                  <a:srgbClr val="FFFFFF"/>
+                </a:solidFill>
+                <a:latin typeface="Calibri"/>
+              </a:rPr>
+              <a:t>Kuja  ·  AI-Powered Grant Management for the Global South</a:t>
+            </a:r>
+          </a:p>
+        </p:txBody>
+      </p:sp>
+      <p:sp>
+        <p:nvSpPr>
+          <p:cNvPr id="8" name="TextBox 7"/>
+          <p:cNvSpPr txBox="1"/>
+          <p:nvPr/>
+        </p:nvSpPr>
+        <p:spPr>
+          <a:xfrm>
+            <a:off x="4572000" y="6675120"/>
+            <a:ext cx="7132320" cy="182880"/>
+          </a:xfrm>
+          <a:prstGeom prst="rect">
+            <a:avLst/>
+          </a:prstGeom>
+          <a:noFill/>
+        </p:spPr>
+        <p:txBody>
+          <a:bodyPr wrap="square" anchor="t">
+            <a:spAutoFit/>
+          </a:bodyPr>
+          <a:lstStyle/>
+          <a:p>
+            <a:pPr algn="r"/>
+            <a:r>
+              <a:rPr sz="900" b="0" i="1">
+                <a:solidFill>
+                  <a:srgbClr val="FFFFFF"/>
+                </a:solidFill>
+                <a:latin typeface="Calibri"/>
+              </a:rPr>
+              <a:t>Market Analysis  ·  v5.0  ·  May 2026</a:t>
+            </a:r>
+          </a:p>
+        </p:txBody>
+      </p:sp>
+    </p:spTree>
+  </p:cSld>
+  <p:clrMapOvr>
+    <a:masterClrMapping/>
+  </p:clrMapOvr>
+</p:sld>
+</file>
+
+<file path=ppt/slides/slide26.xml><?xml version="1.0" encoding="utf-8"?>
 <p:sld xmlns:a="http://schemas.openxmlformats.org/drawingml/2006/main" xmlns:p="http://schemas.openxmlformats.org/presentationml/2006/main" xmlns:r="http://schemas.openxmlformats.org/officeDocument/2006/relationships">
   <p:cSld>
     <p:spTree>
